--- a/classes/parte-18-ia-aplicada-a-la-ciberseguridad/337-ia-para-el-lado-defensivo-soc-triaje-y-forense/clase-337-presentacion.pptx
+++ b/classes/parte-18-ia-aplicada-a-la-ciberseguridad/337-ia-para-el-lado-defensivo-soc-triaje-y-forense/clase-337-presentacion.pptx
@@ -17,6 +17,10 @@
     <p:sldId id="265" r:id="rId16"/>
     <p:sldId id="266" r:id="rId17"/>
     <p:sldId id="267" r:id="rId18"/>
+    <p:sldId id="268" r:id="rId19"/>
+    <p:sldId id="269" r:id="rId20"/>
+    <p:sldId id="270" r:id="rId21"/>
+    <p:sldId id="271" r:id="rId22"/>
   </p:sldIdLst>
   <p:sldSz cx="9144000" cy="6858000" type="screen4x3"/>
   <p:notesSz cx="6858000" cy="9144000"/>
@@ -3198,7 +3202,7 @@
                   <a:srgbClr val="0B3D2E"/>
                 </a:solidFill>
               </a:rPr>
-              <a:t>⚠️ Errores comunes</a:t>
+              <a:t>🧪 Laboratorio guiado</a:t>
             </a:r>
           </a:p>
         </p:txBody>
@@ -3236,52 +3240,67 @@
                   <a:srgbClr val="22282E"/>
                 </a:solidFill>
               </a:rPr>
-              <a:t>•  Cerrar una alerta porque "la IA dijo que era benigna" — Falso negativo. El analista decide con evidencia.</a:t>
-            </a:r>
-          </a:p>
-          <a:p>
-            <a:pPr>
-              <a:spcAft>
-                <a:spcPts val="600"/>
-              </a:spcAft>
-            </a:pPr>
-            <a:r>
-              <a:rPr sz="1500">
-                <a:solidFill>
-                  <a:srgbClr val="22282E"/>
-                </a:solidFill>
-              </a:rPr>
-              <a:t>•  Automatizar respuestas sin supervisión — Riesgo de acción errónea a escala. Mantén aprobación humana.</a:t>
-            </a:r>
-          </a:p>
-          <a:p>
-            <a:pPr>
-              <a:spcAft>
-                <a:spcPts val="600"/>
-              </a:spcAft>
-            </a:pPr>
-            <a:r>
-              <a:rPr sz="1500">
-                <a:solidFill>
-                  <a:srgbClr val="22282E"/>
-                </a:solidFill>
-              </a:rPr>
-              <a:t>•  Enviar logs con PII a un modelo externo — Fuga de datos. Anonimiza o usa modelo aprobado.</a:t>
-            </a:r>
-          </a:p>
-          <a:p>
-            <a:pPr>
-              <a:spcAft>
-                <a:spcPts val="600"/>
-              </a:spcAft>
-            </a:pPr>
-            <a:r>
-              <a:rPr sz="1500">
-                <a:solidFill>
-                  <a:srgbClr val="22282E"/>
-                </a:solidFill>
-              </a:rPr>
-              <a:t>•  Tomar hipótesis forenses como conclusiones — La IA sugiere; la evidencia concluye.</a:t>
+              <a:t>•  Resumen de alertas. Da al LLM un lote de alertas del lab SOC y pídele un resumen priorizado. Contrasta con tu propia priorización.</a:t>
+            </a:r>
+          </a:p>
+          <a:p>
+            <a:pPr>
+              <a:spcAft>
+                <a:spcPts val="600"/>
+              </a:spcAft>
+            </a:pPr>
+            <a:r>
+              <a:rPr sz="1500">
+                <a:solidFill>
+                  <a:srgbClr val="22282E"/>
+                </a:solidFill>
+              </a:rPr>
+              <a:t>•  Correlación. Aporta logs de dos fuentes (auth + red) y pídele la narrativa del incidente. ¿Reconstruyó la fuerza bruta → acceso → movimiento lateral?</a:t>
+            </a:r>
+          </a:p>
+          <a:p>
+            <a:pPr>
+              <a:spcAft>
+                <a:spcPts val="600"/>
+              </a:spcAft>
+            </a:pPr>
+            <a:r>
+              <a:rPr sz="1500">
+                <a:solidFill>
+                  <a:srgbClr val="22282E"/>
+                </a:solidFill>
+              </a:rPr>
+              <a:t>•  Caza del falso negativo. Introduce un evento malicioso sutil y comprueba si la IA lo minimiza. Documenta el riesgo.</a:t>
+            </a:r>
+          </a:p>
+          <a:p>
+            <a:pPr>
+              <a:spcAft>
+                <a:spcPts val="600"/>
+              </a:spcAft>
+            </a:pPr>
+            <a:r>
+              <a:rPr sz="1500">
+                <a:solidFill>
+                  <a:srgbClr val="22282E"/>
+                </a:solidFill>
+              </a:rPr>
+              <a:t>•  Apoyo forense. Sobre una salida de Volatility, pide hipótesis y verifica cada una con la evidencia real.</a:t>
+            </a:r>
+          </a:p>
+          <a:p>
+            <a:pPr>
+              <a:spcAft>
+                <a:spcPts val="600"/>
+              </a:spcAft>
+            </a:pPr>
+            <a:r>
+              <a:rPr sz="1500">
+                <a:solidFill>
+                  <a:srgbClr val="22282E"/>
+                </a:solidFill>
+              </a:rPr>
+              <a:t>•  Decisión. Redacta la decisión de escalado con tu criterio, citando lo que la IA aportó y lo que verificaste.</a:t>
             </a:r>
           </a:p>
         </p:txBody>
@@ -3332,7 +3351,7 @@
                   <a:srgbClr val="0B3D2E"/>
                 </a:solidFill>
               </a:rPr>
-              <a:t>❓ Preguntas frecuentes</a:t>
+              <a:t>✍️ Ejercicios</a:t>
             </a:r>
           </a:p>
         </p:txBody>
@@ -3370,82 +3389,67 @@
                   <a:srgbClr val="22282E"/>
                 </a:solidFill>
               </a:rPr>
-              <a:t>•  ❓ ¿La IA reemplaza a los analistas del SOC?</a:t>
-            </a:r>
-          </a:p>
-          <a:p>
-            <a:pPr>
-              <a:spcAft>
-                <a:spcPts val="600"/>
-              </a:spcAft>
-            </a:pPr>
-            <a:r>
-              <a:rPr sz="1500">
-                <a:solidFill>
-                  <a:srgbClr val="22282E"/>
-                </a:solidFill>
-              </a:rPr>
-              <a:t>•  No; reduce el trabajo repetitivo y acelera el triaje, pero el criterio, el contexto de negocio y</a:t>
-            </a:r>
-          </a:p>
-          <a:p>
-            <a:pPr>
-              <a:spcAft>
-                <a:spcPts val="600"/>
-              </a:spcAft>
-            </a:pPr>
-            <a:r>
-              <a:rPr sz="1500">
-                <a:solidFill>
-                  <a:srgbClr val="22282E"/>
-                </a:solidFill>
-              </a:rPr>
-              <a:t>•  la decisión de escalar siguen siendo humanos.</a:t>
-            </a:r>
-          </a:p>
-          <a:p>
-            <a:pPr>
-              <a:spcAft>
-                <a:spcPts val="600"/>
-              </a:spcAft>
-            </a:pPr>
-            <a:r>
-              <a:rPr sz="1500">
-                <a:solidFill>
-                  <a:srgbClr val="22282E"/>
-                </a:solidFill>
-              </a:rPr>
-              <a:t>•  ❓ ¿Puedo automatizar la respuesta (SOAR) con IA?</a:t>
-            </a:r>
-          </a:p>
-          <a:p>
-            <a:pPr>
-              <a:spcAft>
-                <a:spcPts val="600"/>
-              </a:spcAft>
-            </a:pPr>
-            <a:r>
-              <a:rPr sz="1500">
-                <a:solidFill>
-                  <a:srgbClr val="22282E"/>
-                </a:solidFill>
-              </a:rPr>
-              <a:t>•  Con mucho cuidado y aprobación humana en las acciones con impacto. Una respuesta automática</a:t>
-            </a:r>
-          </a:p>
-          <a:p>
-            <a:pPr>
-              <a:spcAft>
-                <a:spcPts val="600"/>
-              </a:spcAft>
-            </a:pPr>
-            <a:r>
-              <a:rPr sz="1500">
-                <a:solidFill>
-                  <a:srgbClr val="22282E"/>
-                </a:solidFill>
-              </a:rPr>
-              <a:t>•  equivocada puede causar más daño que el incidente.</a:t>
+              <a:t>•  ¿Qué tareas del SOC acelera más un LLM?</a:t>
+            </a:r>
+          </a:p>
+          <a:p>
+            <a:pPr>
+              <a:spcAft>
+                <a:spcPts val="600"/>
+              </a:spcAft>
+            </a:pPr>
+            <a:r>
+              <a:rPr sz="1500">
+                <a:solidFill>
+                  <a:srgbClr val="22282E"/>
+                </a:solidFill>
+              </a:rPr>
+              <a:t>•  Explica por qué un falso negativo asistido por IA es más peligroso que un falso positivo.</a:t>
+            </a:r>
+          </a:p>
+          <a:p>
+            <a:pPr>
+              <a:spcAft>
+                <a:spcPts val="600"/>
+              </a:spcAft>
+            </a:pPr>
+            <a:r>
+              <a:rPr sz="1500">
+                <a:solidFill>
+                  <a:srgbClr val="22282E"/>
+                </a:solidFill>
+              </a:rPr>
+              <a:t>•  Diseña un flujo de triaje con IA donde el analista siempre decide.</a:t>
+            </a:r>
+          </a:p>
+          <a:p>
+            <a:pPr>
+              <a:spcAft>
+                <a:spcPts val="600"/>
+              </a:spcAft>
+            </a:pPr>
+            <a:r>
+              <a:rPr sz="1500">
+                <a:solidFill>
+                  <a:srgbClr val="22282E"/>
+                </a:solidFill>
+              </a:rPr>
+              <a:t>•  ¿Cómo usarías IA en forense sin comprometer la cadena de evidencia?</a:t>
+            </a:r>
+          </a:p>
+          <a:p>
+            <a:pPr>
+              <a:spcAft>
+                <a:spcPts val="600"/>
+              </a:spcAft>
+            </a:pPr>
+            <a:r>
+              <a:rPr sz="1500">
+                <a:solidFill>
+                  <a:srgbClr val="22282E"/>
+                </a:solidFill>
+              </a:rPr>
+              <a:t>•  ¿Qué datos del SOC no enviarías a un modelo externo?</a:t>
             </a:r>
           </a:p>
         </p:txBody>
@@ -3496,7 +3500,7 @@
                   <a:srgbClr val="0B3D2E"/>
                 </a:solidFill>
               </a:rPr>
-              <a:t>🔗 Referencias</a:t>
+              <a:t>📝 Reto verificable</a:t>
             </a:r>
           </a:p>
         </p:txBody>
@@ -3534,6 +3538,438 @@
                   <a:srgbClr val="22282E"/>
                 </a:solidFill>
               </a:rPr>
+              <a:t>•  Toma un incidente del lab, genera con IA un resumen + narrativa y valida cada afirmación</a:t>
+            </a:r>
+          </a:p>
+          <a:p>
+            <a:pPr>
+              <a:spcAft>
+                <a:spcPts val="600"/>
+              </a:spcAft>
+            </a:pPr>
+            <a:r>
+              <a:rPr sz="1500">
+                <a:solidFill>
+                  <a:srgbClr val="22282E"/>
+                </a:solidFill>
+              </a:rPr>
+              <a:t>•  contra los logs reales.</a:t>
+            </a:r>
+          </a:p>
+          <a:p>
+            <a:pPr>
+              <a:spcAft>
+                <a:spcPts val="600"/>
+              </a:spcAft>
+            </a:pPr>
+            <a:r>
+              <a:rPr sz="1500">
+                <a:solidFill>
+                  <a:srgbClr val="22282E"/>
+                </a:solidFill>
+              </a:rPr>
+              <a:t>•  Criterio de aceptación: entregas el resumen, marcas al menos una afirmación imprecisa de la</a:t>
+            </a:r>
+          </a:p>
+          <a:p>
+            <a:pPr>
+              <a:spcAft>
+                <a:spcPts val="600"/>
+              </a:spcAft>
+            </a:pPr>
+            <a:r>
+              <a:rPr sz="1500">
+                <a:solidFill>
+                  <a:srgbClr val="22282E"/>
+                </a:solidFill>
+              </a:rPr>
+              <a:t>•  IA y la corriges con la evidencia; la decisión de escalado es tuya y está justificada.</a:t>
+            </a:r>
+          </a:p>
+        </p:txBody>
+      </p:sp>
+    </p:spTree>
+  </p:cSld>
+  <p:clrMapOvr>
+    <a:masterClrMapping/>
+  </p:clrMapOvr>
+</p:sld>
+</file>
+
+<file path=ppt/slides/slide13.xml><?xml version="1.0" encoding="utf-8"?>
+<p:sld xmlns:a="http://schemas.openxmlformats.org/drawingml/2006/main" xmlns:p="http://schemas.openxmlformats.org/presentationml/2006/main" xmlns:r="http://schemas.openxmlformats.org/officeDocument/2006/relationships">
+  <p:cSld>
+    <p:spTree>
+      <p:nvGrpSpPr>
+        <p:cNvPr id="1" name=""/>
+        <p:cNvGrpSpPr/>
+        <p:nvPr/>
+      </p:nvGrpSpPr>
+      <p:grpSpPr/>
+      <p:sp>
+        <p:nvSpPr>
+          <p:cNvPr id="2" name="TextBox 1"/>
+          <p:cNvSpPr txBox="1"/>
+          <p:nvPr/>
+        </p:nvSpPr>
+        <p:spPr>
+          <a:xfrm>
+            <a:off x="457200" y="320040"/>
+            <a:ext cx="8229600" cy="822960"/>
+          </a:xfrm>
+          <a:prstGeom prst="rect">
+            <a:avLst/>
+          </a:prstGeom>
+          <a:noFill/>
+        </p:spPr>
+        <p:txBody>
+          <a:bodyPr wrap="square">
+            <a:spAutoFit/>
+          </a:bodyPr>
+          <a:lstStyle/>
+          <a:p>
+            <a:r>
+              <a:rPr sz="2600" b="1">
+                <a:solidFill>
+                  <a:srgbClr val="0B3D2E"/>
+                </a:solidFill>
+              </a:rPr>
+              <a:t>⚠️ Errores comunes</a:t>
+            </a:r>
+          </a:p>
+        </p:txBody>
+      </p:sp>
+      <p:sp>
+        <p:nvSpPr>
+          <p:cNvPr id="3" name="TextBox 2"/>
+          <p:cNvSpPr txBox="1"/>
+          <p:nvPr/>
+        </p:nvSpPr>
+        <p:spPr>
+          <a:xfrm>
+            <a:off x="457200" y="1280160"/>
+            <a:ext cx="8229600" cy="4937760"/>
+          </a:xfrm>
+          <a:prstGeom prst="rect">
+            <a:avLst/>
+          </a:prstGeom>
+          <a:noFill/>
+        </p:spPr>
+        <p:txBody>
+          <a:bodyPr wrap="square">
+            <a:spAutoFit/>
+          </a:bodyPr>
+          <a:lstStyle/>
+          <a:p>
+            <a:pPr>
+              <a:spcAft>
+                <a:spcPts val="600"/>
+              </a:spcAft>
+            </a:pPr>
+            <a:r>
+              <a:rPr sz="1500">
+                <a:solidFill>
+                  <a:srgbClr val="22282E"/>
+                </a:solidFill>
+              </a:rPr>
+              <a:t>•  Cerrar una alerta porque "la IA dijo que era benigna" — Falso negativo. El analista decide con evidencia.</a:t>
+            </a:r>
+          </a:p>
+          <a:p>
+            <a:pPr>
+              <a:spcAft>
+                <a:spcPts val="600"/>
+              </a:spcAft>
+            </a:pPr>
+            <a:r>
+              <a:rPr sz="1500">
+                <a:solidFill>
+                  <a:srgbClr val="22282E"/>
+                </a:solidFill>
+              </a:rPr>
+              <a:t>•  Automatizar respuestas sin supervisión — Riesgo de acción errónea a escala. Mantén aprobación humana.</a:t>
+            </a:r>
+          </a:p>
+          <a:p>
+            <a:pPr>
+              <a:spcAft>
+                <a:spcPts val="600"/>
+              </a:spcAft>
+            </a:pPr>
+            <a:r>
+              <a:rPr sz="1500">
+                <a:solidFill>
+                  <a:srgbClr val="22282E"/>
+                </a:solidFill>
+              </a:rPr>
+              <a:t>•  Enviar logs con PII a un modelo externo — Fuga de datos. Anonimiza o usa modelo aprobado.</a:t>
+            </a:r>
+          </a:p>
+          <a:p>
+            <a:pPr>
+              <a:spcAft>
+                <a:spcPts val="600"/>
+              </a:spcAft>
+            </a:pPr>
+            <a:r>
+              <a:rPr sz="1500">
+                <a:solidFill>
+                  <a:srgbClr val="22282E"/>
+                </a:solidFill>
+              </a:rPr>
+              <a:t>•  Tomar hipótesis forenses como conclusiones — La IA sugiere; la evidencia concluye.</a:t>
+            </a:r>
+          </a:p>
+        </p:txBody>
+      </p:sp>
+    </p:spTree>
+  </p:cSld>
+  <p:clrMapOvr>
+    <a:masterClrMapping/>
+  </p:clrMapOvr>
+</p:sld>
+</file>
+
+<file path=ppt/slides/slide14.xml><?xml version="1.0" encoding="utf-8"?>
+<p:sld xmlns:a="http://schemas.openxmlformats.org/drawingml/2006/main" xmlns:p="http://schemas.openxmlformats.org/presentationml/2006/main" xmlns:r="http://schemas.openxmlformats.org/officeDocument/2006/relationships">
+  <p:cSld>
+    <p:spTree>
+      <p:nvGrpSpPr>
+        <p:cNvPr id="1" name=""/>
+        <p:cNvGrpSpPr/>
+        <p:nvPr/>
+      </p:nvGrpSpPr>
+      <p:grpSpPr/>
+      <p:sp>
+        <p:nvSpPr>
+          <p:cNvPr id="2" name="TextBox 1"/>
+          <p:cNvSpPr txBox="1"/>
+          <p:nvPr/>
+        </p:nvSpPr>
+        <p:spPr>
+          <a:xfrm>
+            <a:off x="457200" y="320040"/>
+            <a:ext cx="8229600" cy="822960"/>
+          </a:xfrm>
+          <a:prstGeom prst="rect">
+            <a:avLst/>
+          </a:prstGeom>
+          <a:noFill/>
+        </p:spPr>
+        <p:txBody>
+          <a:bodyPr wrap="square">
+            <a:spAutoFit/>
+          </a:bodyPr>
+          <a:lstStyle/>
+          <a:p>
+            <a:r>
+              <a:rPr sz="2600" b="1">
+                <a:solidFill>
+                  <a:srgbClr val="0B3D2E"/>
+                </a:solidFill>
+              </a:rPr>
+              <a:t>❓ Preguntas frecuentes</a:t>
+            </a:r>
+          </a:p>
+        </p:txBody>
+      </p:sp>
+      <p:sp>
+        <p:nvSpPr>
+          <p:cNvPr id="3" name="TextBox 2"/>
+          <p:cNvSpPr txBox="1"/>
+          <p:nvPr/>
+        </p:nvSpPr>
+        <p:spPr>
+          <a:xfrm>
+            <a:off x="457200" y="1280160"/>
+            <a:ext cx="8229600" cy="4937760"/>
+          </a:xfrm>
+          <a:prstGeom prst="rect">
+            <a:avLst/>
+          </a:prstGeom>
+          <a:noFill/>
+        </p:spPr>
+        <p:txBody>
+          <a:bodyPr wrap="square">
+            <a:spAutoFit/>
+          </a:bodyPr>
+          <a:lstStyle/>
+          <a:p>
+            <a:pPr>
+              <a:spcAft>
+                <a:spcPts val="600"/>
+              </a:spcAft>
+            </a:pPr>
+            <a:r>
+              <a:rPr sz="1500">
+                <a:solidFill>
+                  <a:srgbClr val="22282E"/>
+                </a:solidFill>
+              </a:rPr>
+              <a:t>•  ❓ ¿La IA reemplaza a los analistas del SOC?</a:t>
+            </a:r>
+          </a:p>
+          <a:p>
+            <a:pPr>
+              <a:spcAft>
+                <a:spcPts val="600"/>
+              </a:spcAft>
+            </a:pPr>
+            <a:r>
+              <a:rPr sz="1500">
+                <a:solidFill>
+                  <a:srgbClr val="22282E"/>
+                </a:solidFill>
+              </a:rPr>
+              <a:t>•  No; reduce el trabajo repetitivo y acelera el triaje, pero el criterio, el contexto de negocio y</a:t>
+            </a:r>
+          </a:p>
+          <a:p>
+            <a:pPr>
+              <a:spcAft>
+                <a:spcPts val="600"/>
+              </a:spcAft>
+            </a:pPr>
+            <a:r>
+              <a:rPr sz="1500">
+                <a:solidFill>
+                  <a:srgbClr val="22282E"/>
+                </a:solidFill>
+              </a:rPr>
+              <a:t>•  la decisión de escalar siguen siendo humanos.</a:t>
+            </a:r>
+          </a:p>
+          <a:p>
+            <a:pPr>
+              <a:spcAft>
+                <a:spcPts val="600"/>
+              </a:spcAft>
+            </a:pPr>
+            <a:r>
+              <a:rPr sz="1500">
+                <a:solidFill>
+                  <a:srgbClr val="22282E"/>
+                </a:solidFill>
+              </a:rPr>
+              <a:t>•  ❓ ¿Puedo automatizar la respuesta (SOAR) con IA?</a:t>
+            </a:r>
+          </a:p>
+          <a:p>
+            <a:pPr>
+              <a:spcAft>
+                <a:spcPts val="600"/>
+              </a:spcAft>
+            </a:pPr>
+            <a:r>
+              <a:rPr sz="1500">
+                <a:solidFill>
+                  <a:srgbClr val="22282E"/>
+                </a:solidFill>
+              </a:rPr>
+              <a:t>•  Con mucho cuidado y aprobación humana en las acciones con impacto. Una respuesta automática</a:t>
+            </a:r>
+          </a:p>
+          <a:p>
+            <a:pPr>
+              <a:spcAft>
+                <a:spcPts val="600"/>
+              </a:spcAft>
+            </a:pPr>
+            <a:r>
+              <a:rPr sz="1500">
+                <a:solidFill>
+                  <a:srgbClr val="22282E"/>
+                </a:solidFill>
+              </a:rPr>
+              <a:t>•  equivocada puede causar más daño que el incidente.</a:t>
+            </a:r>
+          </a:p>
+        </p:txBody>
+      </p:sp>
+    </p:spTree>
+  </p:cSld>
+  <p:clrMapOvr>
+    <a:masterClrMapping/>
+  </p:clrMapOvr>
+</p:sld>
+</file>
+
+<file path=ppt/slides/slide15.xml><?xml version="1.0" encoding="utf-8"?>
+<p:sld xmlns:a="http://schemas.openxmlformats.org/drawingml/2006/main" xmlns:p="http://schemas.openxmlformats.org/presentationml/2006/main" xmlns:r="http://schemas.openxmlformats.org/officeDocument/2006/relationships">
+  <p:cSld>
+    <p:spTree>
+      <p:nvGrpSpPr>
+        <p:cNvPr id="1" name=""/>
+        <p:cNvGrpSpPr/>
+        <p:nvPr/>
+      </p:nvGrpSpPr>
+      <p:grpSpPr/>
+      <p:sp>
+        <p:nvSpPr>
+          <p:cNvPr id="2" name="TextBox 1"/>
+          <p:cNvSpPr txBox="1"/>
+          <p:nvPr/>
+        </p:nvSpPr>
+        <p:spPr>
+          <a:xfrm>
+            <a:off x="457200" y="320040"/>
+            <a:ext cx="8229600" cy="822960"/>
+          </a:xfrm>
+          <a:prstGeom prst="rect">
+            <a:avLst/>
+          </a:prstGeom>
+          <a:noFill/>
+        </p:spPr>
+        <p:txBody>
+          <a:bodyPr wrap="square">
+            <a:spAutoFit/>
+          </a:bodyPr>
+          <a:lstStyle/>
+          <a:p>
+            <a:r>
+              <a:rPr sz="2600" b="1">
+                <a:solidFill>
+                  <a:srgbClr val="0B3D2E"/>
+                </a:solidFill>
+              </a:rPr>
+              <a:t>🔗 Referencias</a:t>
+            </a:r>
+          </a:p>
+        </p:txBody>
+      </p:sp>
+      <p:sp>
+        <p:nvSpPr>
+          <p:cNvPr id="3" name="TextBox 2"/>
+          <p:cNvSpPr txBox="1"/>
+          <p:nvPr/>
+        </p:nvSpPr>
+        <p:spPr>
+          <a:xfrm>
+            <a:off x="457200" y="1280160"/>
+            <a:ext cx="8229600" cy="4937760"/>
+          </a:xfrm>
+          <a:prstGeom prst="rect">
+            <a:avLst/>
+          </a:prstGeom>
+          <a:noFill/>
+        </p:spPr>
+        <p:txBody>
+          <a:bodyPr wrap="square">
+            <a:spAutoFit/>
+          </a:bodyPr>
+          <a:lstStyle/>
+          <a:p>
+            <a:pPr>
+              <a:spcAft>
+                <a:spcPts val="600"/>
+              </a:spcAft>
+            </a:pPr>
+            <a:r>
+              <a:rPr sz="1500">
+                <a:solidFill>
+                  <a:srgbClr val="22282E"/>
+                </a:solidFill>
+              </a:rPr>
               <a:t>•  Parte 8 (SOC/detección) y Parte 9 (DFIR) del programa.</a:t>
             </a:r>
           </a:p>
@@ -3554,6 +3990,81 @@
           </a:p>
         </p:txBody>
       </p:sp>
+    </p:spTree>
+  </p:cSld>
+  <p:clrMapOvr>
+    <a:masterClrMapping/>
+  </p:clrMapOvr>
+</p:sld>
+</file>
+
+<file path=ppt/slides/slide16.xml><?xml version="1.0" encoding="utf-8"?>
+<p:sld xmlns:a="http://schemas.openxmlformats.org/drawingml/2006/main" xmlns:p="http://schemas.openxmlformats.org/presentationml/2006/main" xmlns:r="http://schemas.openxmlformats.org/officeDocument/2006/relationships">
+  <p:cSld>
+    <p:spTree>
+      <p:nvGrpSpPr>
+        <p:cNvPr id="1" name=""/>
+        <p:cNvGrpSpPr/>
+        <p:nvPr/>
+      </p:nvGrpSpPr>
+      <p:grpSpPr/>
+      <p:sp>
+        <p:nvSpPr>
+          <p:cNvPr id="2" name="TextBox 1"/>
+          <p:cNvSpPr txBox="1"/>
+          <p:nvPr/>
+        </p:nvSpPr>
+        <p:spPr>
+          <a:xfrm>
+            <a:off x="457200" y="274320"/>
+            <a:ext cx="8229600" cy="640080"/>
+          </a:xfrm>
+          <a:prstGeom prst="rect">
+            <a:avLst/>
+          </a:prstGeom>
+          <a:noFill/>
+        </p:spPr>
+        <p:txBody>
+          <a:bodyPr wrap="square">
+            <a:spAutoFit/>
+          </a:bodyPr>
+          <a:lstStyle/>
+          <a:p>
+            <a:r>
+              <a:rPr sz="2200" b="1">
+                <a:solidFill>
+                  <a:srgbClr val="0B3D2E"/>
+                </a:solidFill>
+              </a:rPr>
+              <a:t>Diagrama de la clase</a:t>
+            </a:r>
+          </a:p>
+        </p:txBody>
+      </p:sp>
+      <p:pic>
+        <p:nvPicPr>
+          <p:cNvPr id="3" name="Picture 2" descr="2e4e99e333984546.png"/>
+          <p:cNvPicPr>
+            <a:picLocks noChangeAspect="1"/>
+          </p:cNvPicPr>
+          <p:nvPr/>
+        </p:nvPicPr>
+        <p:blipFill>
+          <a:blip r:embed="rId2"/>
+          <a:stretch>
+            <a:fillRect/>
+          </a:stretch>
+        </p:blipFill>
+        <p:spPr>
+          <a:xfrm>
+            <a:off x="457200" y="3338147"/>
+            <a:ext cx="8229600" cy="821786"/>
+          </a:xfrm>
+          <a:prstGeom prst="rect">
+            <a:avLst/>
+          </a:prstGeom>
+        </p:spPr>
+      </p:pic>
     </p:spTree>
   </p:cSld>
   <p:clrMapOvr>
@@ -4032,7 +4543,7 @@
                   <a:srgbClr val="0B3D2E"/>
                 </a:solidFill>
               </a:rPr>
-              <a:t>📖 Definiciones y características</a:t>
+              <a:t>🧠 Explicación en profundidad</a:t>
             </a:r>
           </a:p>
         </p:txBody>
@@ -4070,97 +4581,37 @@
                   <a:srgbClr val="22282E"/>
                 </a:solidFill>
               </a:rPr>
-              <a:t>•  Triaje asistido</a:t>
-            </a:r>
-          </a:p>
-          <a:p>
-            <a:pPr>
-              <a:spcAft>
-                <a:spcPts val="600"/>
-              </a:spcAft>
-            </a:pPr>
-            <a:r>
-              <a:rPr sz="1500">
-                <a:solidFill>
-                  <a:srgbClr val="22282E"/>
-                </a:solidFill>
-              </a:rPr>
-              <a:t>•  Uso de IA para priorizar y resumir alertas, dejando la decisión de escalar al analista.</a:t>
-            </a:r>
-          </a:p>
-          <a:p>
-            <a:pPr>
-              <a:spcAft>
-                <a:spcPts val="600"/>
-              </a:spcAft>
-            </a:pPr>
-            <a:r>
-              <a:rPr sz="1500">
-                <a:solidFill>
-                  <a:srgbClr val="22282E"/>
-                </a:solidFill>
-              </a:rPr>
-              <a:t>•  Fatiga de alertas</a:t>
-            </a:r>
-          </a:p>
-          <a:p>
-            <a:pPr>
-              <a:spcAft>
-                <a:spcPts val="600"/>
-              </a:spcAft>
-            </a:pPr>
-            <a:r>
-              <a:rPr sz="1500">
-                <a:solidFill>
-                  <a:srgbClr val="22282E"/>
-                </a:solidFill>
-              </a:rPr>
-              <a:t>•  Saturación por exceso de alertas que lleva a ignorar las importantes; la IA puede aliviarla resumiendo y agrupando.</a:t>
-            </a:r>
-          </a:p>
-          <a:p>
-            <a:pPr>
-              <a:spcAft>
-                <a:spcPts val="600"/>
-              </a:spcAft>
-            </a:pPr>
-            <a:r>
-              <a:rPr sz="1500">
-                <a:solidFill>
-                  <a:srgbClr val="22282E"/>
-                </a:solidFill>
-              </a:rPr>
-              <a:t>•  Falso negativo</a:t>
-            </a:r>
-          </a:p>
-          <a:p>
-            <a:pPr>
-              <a:spcAft>
-                <a:spcPts val="600"/>
-              </a:spcAft>
-            </a:pPr>
-            <a:r>
-              <a:rPr sz="1500">
-                <a:solidFill>
-                  <a:srgbClr val="22282E"/>
-                </a:solidFill>
-              </a:rPr>
-              <a:t>•  Amenaza real no detectada/clasificada como benigna. En defensa asistida por IA es el riesgo más grave.</a:t>
-            </a:r>
-          </a:p>
-          <a:p>
-            <a:pPr>
-              <a:spcAft>
-                <a:spcPts val="600"/>
-              </a:spcAft>
-            </a:pPr>
-            <a:r>
-              <a:rPr sz="1500">
-                <a:solidFill>
-                  <a:srgbClr val="22282E"/>
-                </a:solidFill>
-              </a:rPr>
-              <a:t>•  Cadena de evidencia</a:t>
+              <a:t>•  En SOC y forense, el modelo ayuda a priorizar y resumir, pero la cadena de evidencia permanece fuera del prompt. Las salidas citan eventos, preservan originales y permiten revisión humana antes de…</a:t>
+            </a:r>
+          </a:p>
+          <a:p>
+            <a:pPr>
+              <a:spcAft>
+                <a:spcPts val="600"/>
+              </a:spcAft>
+            </a:pPr>
+            <a:r>
+              <a:rPr sz="1500">
+                <a:solidFill>
+                  <a:srgbClr val="22282E"/>
+                </a:solidFill>
+              </a:rPr>
+              <a:t>•  El diagrama separa lenguaje de autoridad. El modelo puede proponer; la política determina si la operación pertenece al alcance; la herramienta produce evidencia; y una persona o control determinista…</a:t>
+            </a:r>
+          </a:p>
+          <a:p>
+            <a:pPr>
+              <a:spcAft>
+                <a:spcPts val="600"/>
+              </a:spcAft>
+            </a:pPr>
+            <a:r>
+              <a:rPr sz="1500">
+                <a:solidFill>
+                  <a:srgbClr val="22282E"/>
+                </a:solidFill>
+              </a:rPr>
+              <a:t>•  El resumen omite una cuenta afectada. La interfaz conserva consulta y filas fuente, y el analista corrige el alcance.</a:t>
             </a:r>
           </a:p>
         </p:txBody>
@@ -4211,7 +4662,7 @@
                   <a:srgbClr val="0B3D2E"/>
                 </a:solidFill>
               </a:rPr>
-              <a:t>🧰 Herramientas y preparación</a:t>
+              <a:t>📔 Glosario operativo</a:t>
             </a:r>
           </a:p>
         </p:txBody>
@@ -4249,22 +4700,52 @@
                   <a:srgbClr val="22282E"/>
                 </a:solidFill>
               </a:rPr>
-              <a:t>•  Un LLM y datos de un ejercicio defensivo (p. ej. el lab blue-team-soc</a:t>
-            </a:r>
-          </a:p>
-          <a:p>
-            <a:pPr>
-              <a:spcAft>
-                <a:spcPts val="600"/>
-              </a:spcAft>
-            </a:pPr>
-            <a:r>
-              <a:rPr sz="1500">
-                <a:solidFill>
-                  <a:srgbClr val="22282E"/>
-                </a:solidFill>
-              </a:rPr>
-              <a:t>•  o el dfir-memoria). Trabaja con datos anonimizados.</a:t>
+              <a:t>•  Término — Definición</a:t>
+            </a:r>
+          </a:p>
+          <a:p>
+            <a:pPr>
+              <a:spcAft>
+                <a:spcPts val="600"/>
+              </a:spcAft>
+            </a:pPr>
+            <a:r>
+              <a:rPr sz="1500">
+                <a:solidFill>
+                  <a:srgbClr val="22282E"/>
+                </a:solidFill>
+              </a:rPr>
+              <a:t>•  Evidence pointer — Referencia estable al artefacto original que sustenta una frase.</a:t>
+            </a:r>
+          </a:p>
+          <a:p>
+            <a:pPr>
+              <a:spcAft>
+                <a:spcPts val="600"/>
+              </a:spcAft>
+            </a:pPr>
+            <a:r>
+              <a:rPr sz="1500">
+                <a:solidFill>
+                  <a:srgbClr val="22282E"/>
+                </a:solidFill>
+              </a:rPr>
+              <a:t>•  Guardrail — Capa que reduce una capacidad o detecta su uso; no garantía absoluta.</a:t>
+            </a:r>
+          </a:p>
+          <a:p>
+            <a:pPr>
+              <a:spcAft>
+                <a:spcPts val="600"/>
+              </a:spcAft>
+            </a:pPr>
+            <a:r>
+              <a:rPr sz="1500">
+                <a:solidFill>
+                  <a:srgbClr val="22282E"/>
+                </a:solidFill>
+              </a:rPr>
+              <a:t>•  Audit trail — Registro ordenado de solicitudes, decisiones, ejecuciones y resultados.</a:t>
             </a:r>
           </a:p>
         </p:txBody>
@@ -4315,7 +4796,7 @@
                   <a:srgbClr val="0B3D2E"/>
                 </a:solidFill>
               </a:rPr>
-              <a:t>🧪 Laboratorio guiado</a:t>
+              <a:t>✅ Criterio de dominio</a:t>
             </a:r>
           </a:p>
         </p:txBody>
@@ -4353,67 +4834,7 @@
                   <a:srgbClr val="22282E"/>
                 </a:solidFill>
               </a:rPr>
-              <a:t>•  Resumen de alertas. Da al LLM un lote de alertas del lab SOC y pídele un resumen priorizado. Contrasta con tu propia priorización.</a:t>
-            </a:r>
-          </a:p>
-          <a:p>
-            <a:pPr>
-              <a:spcAft>
-                <a:spcPts val="600"/>
-              </a:spcAft>
-            </a:pPr>
-            <a:r>
-              <a:rPr sz="1500">
-                <a:solidFill>
-                  <a:srgbClr val="22282E"/>
-                </a:solidFill>
-              </a:rPr>
-              <a:t>•  Correlación. Aporta logs de dos fuentes (auth + red) y pídele la narrativa del incidente. ¿Reconstruyó la fuerza bruta → acceso → movimiento lateral?</a:t>
-            </a:r>
-          </a:p>
-          <a:p>
-            <a:pPr>
-              <a:spcAft>
-                <a:spcPts val="600"/>
-              </a:spcAft>
-            </a:pPr>
-            <a:r>
-              <a:rPr sz="1500">
-                <a:solidFill>
-                  <a:srgbClr val="22282E"/>
-                </a:solidFill>
-              </a:rPr>
-              <a:t>•  Caza del falso negativo. Introduce un evento malicioso sutil y comprueba si la IA lo minimiza. Documenta el riesgo.</a:t>
-            </a:r>
-          </a:p>
-          <a:p>
-            <a:pPr>
-              <a:spcAft>
-                <a:spcPts val="600"/>
-              </a:spcAft>
-            </a:pPr>
-            <a:r>
-              <a:rPr sz="1500">
-                <a:solidFill>
-                  <a:srgbClr val="22282E"/>
-                </a:solidFill>
-              </a:rPr>
-              <a:t>•  Apoyo forense. Sobre una salida de Volatility, pide hipótesis y verifica cada una con la evidencia real.</a:t>
-            </a:r>
-          </a:p>
-          <a:p>
-            <a:pPr>
-              <a:spcAft>
-                <a:spcPts val="600"/>
-              </a:spcAft>
-            </a:pPr>
-            <a:r>
-              <a:rPr sz="1500">
-                <a:solidFill>
-                  <a:srgbClr val="22282E"/>
-                </a:solidFill>
-              </a:rPr>
-              <a:t>•  Decisión. Redacta la decisión de escalado con tu criterio, citando lo que la IA aportó y lo que verificaste.</a:t>
+              <a:t>•  El alumno demuestra dominio cuando reproduce el flujo completo, puede atribuir cada acción, evita que texto no confiable otorgue autoridad y explica qué control contiene un fallo del modelo.</a:t>
             </a:r>
           </a:p>
         </p:txBody>
@@ -4464,7 +4885,7 @@
                   <a:srgbClr val="0B3D2E"/>
                 </a:solidFill>
               </a:rPr>
-              <a:t>✍️ Ejercicios</a:t>
+              <a:t>📖 Definiciones y características</a:t>
             </a:r>
           </a:p>
         </p:txBody>
@@ -4502,67 +4923,97 @@
                   <a:srgbClr val="22282E"/>
                 </a:solidFill>
               </a:rPr>
-              <a:t>•  ¿Qué tareas del SOC acelera más un LLM?</a:t>
-            </a:r>
-          </a:p>
-          <a:p>
-            <a:pPr>
-              <a:spcAft>
-                <a:spcPts val="600"/>
-              </a:spcAft>
-            </a:pPr>
-            <a:r>
-              <a:rPr sz="1500">
-                <a:solidFill>
-                  <a:srgbClr val="22282E"/>
-                </a:solidFill>
-              </a:rPr>
-              <a:t>•  Explica por qué un falso negativo asistido por IA es más peligroso que un falso positivo.</a:t>
-            </a:r>
-          </a:p>
-          <a:p>
-            <a:pPr>
-              <a:spcAft>
-                <a:spcPts val="600"/>
-              </a:spcAft>
-            </a:pPr>
-            <a:r>
-              <a:rPr sz="1500">
-                <a:solidFill>
-                  <a:srgbClr val="22282E"/>
-                </a:solidFill>
-              </a:rPr>
-              <a:t>•  Diseña un flujo de triaje con IA donde el analista siempre decide.</a:t>
-            </a:r>
-          </a:p>
-          <a:p>
-            <a:pPr>
-              <a:spcAft>
-                <a:spcPts val="600"/>
-              </a:spcAft>
-            </a:pPr>
-            <a:r>
-              <a:rPr sz="1500">
-                <a:solidFill>
-                  <a:srgbClr val="22282E"/>
-                </a:solidFill>
-              </a:rPr>
-              <a:t>•  ¿Cómo usarías IA en forense sin comprometer la cadena de evidencia?</a:t>
-            </a:r>
-          </a:p>
-          <a:p>
-            <a:pPr>
-              <a:spcAft>
-                <a:spcPts val="600"/>
-              </a:spcAft>
-            </a:pPr>
-            <a:r>
-              <a:rPr sz="1500">
-                <a:solidFill>
-                  <a:srgbClr val="22282E"/>
-                </a:solidFill>
-              </a:rPr>
-              <a:t>•  ¿Qué datos del SOC no enviarías a un modelo externo?</a:t>
+              <a:t>•  Triaje asistido</a:t>
+            </a:r>
+          </a:p>
+          <a:p>
+            <a:pPr>
+              <a:spcAft>
+                <a:spcPts val="600"/>
+              </a:spcAft>
+            </a:pPr>
+            <a:r>
+              <a:rPr sz="1500">
+                <a:solidFill>
+                  <a:srgbClr val="22282E"/>
+                </a:solidFill>
+              </a:rPr>
+              <a:t>•  Uso de IA para priorizar y resumir alertas, dejando la decisión de escalar al analista.</a:t>
+            </a:r>
+          </a:p>
+          <a:p>
+            <a:pPr>
+              <a:spcAft>
+                <a:spcPts val="600"/>
+              </a:spcAft>
+            </a:pPr>
+            <a:r>
+              <a:rPr sz="1500">
+                <a:solidFill>
+                  <a:srgbClr val="22282E"/>
+                </a:solidFill>
+              </a:rPr>
+              <a:t>•  Fatiga de alertas</a:t>
+            </a:r>
+          </a:p>
+          <a:p>
+            <a:pPr>
+              <a:spcAft>
+                <a:spcPts val="600"/>
+              </a:spcAft>
+            </a:pPr>
+            <a:r>
+              <a:rPr sz="1500">
+                <a:solidFill>
+                  <a:srgbClr val="22282E"/>
+                </a:solidFill>
+              </a:rPr>
+              <a:t>•  Saturación por exceso de alertas que lleva a ignorar las importantes; la IA puede aliviarla resumiendo y agrupando.</a:t>
+            </a:r>
+          </a:p>
+          <a:p>
+            <a:pPr>
+              <a:spcAft>
+                <a:spcPts val="600"/>
+              </a:spcAft>
+            </a:pPr>
+            <a:r>
+              <a:rPr sz="1500">
+                <a:solidFill>
+                  <a:srgbClr val="22282E"/>
+                </a:solidFill>
+              </a:rPr>
+              <a:t>•  Falso negativo</a:t>
+            </a:r>
+          </a:p>
+          <a:p>
+            <a:pPr>
+              <a:spcAft>
+                <a:spcPts val="600"/>
+              </a:spcAft>
+            </a:pPr>
+            <a:r>
+              <a:rPr sz="1500">
+                <a:solidFill>
+                  <a:srgbClr val="22282E"/>
+                </a:solidFill>
+              </a:rPr>
+              <a:t>•  Amenaza real no detectada/clasificada como benigna. En defensa asistida por IA es el riesgo más grave.</a:t>
+            </a:r>
+          </a:p>
+          <a:p>
+            <a:pPr>
+              <a:spcAft>
+                <a:spcPts val="600"/>
+              </a:spcAft>
+            </a:pPr>
+            <a:r>
+              <a:rPr sz="1500">
+                <a:solidFill>
+                  <a:srgbClr val="22282E"/>
+                </a:solidFill>
+              </a:rPr>
+              <a:t>•  Cadena de evidencia</a:t>
             </a:r>
           </a:p>
         </p:txBody>
@@ -4613,7 +5064,7 @@
                   <a:srgbClr val="0B3D2E"/>
                 </a:solidFill>
               </a:rPr>
-              <a:t>📝 Reto verificable</a:t>
+              <a:t>🧰 Herramientas y preparación</a:t>
             </a:r>
           </a:p>
         </p:txBody>
@@ -4651,52 +5102,22 @@
                   <a:srgbClr val="22282E"/>
                 </a:solidFill>
               </a:rPr>
-              <a:t>•  Toma un incidente del lab, genera con IA un resumen + narrativa y valida cada afirmación</a:t>
-            </a:r>
-          </a:p>
-          <a:p>
-            <a:pPr>
-              <a:spcAft>
-                <a:spcPts val="600"/>
-              </a:spcAft>
-            </a:pPr>
-            <a:r>
-              <a:rPr sz="1500">
-                <a:solidFill>
-                  <a:srgbClr val="22282E"/>
-                </a:solidFill>
-              </a:rPr>
-              <a:t>•  contra los logs reales.</a:t>
-            </a:r>
-          </a:p>
-          <a:p>
-            <a:pPr>
-              <a:spcAft>
-                <a:spcPts val="600"/>
-              </a:spcAft>
-            </a:pPr>
-            <a:r>
-              <a:rPr sz="1500">
-                <a:solidFill>
-                  <a:srgbClr val="22282E"/>
-                </a:solidFill>
-              </a:rPr>
-              <a:t>•  Criterio de aceptación: entregas el resumen, marcas al menos una afirmación imprecisa de la</a:t>
-            </a:r>
-          </a:p>
-          <a:p>
-            <a:pPr>
-              <a:spcAft>
-                <a:spcPts val="600"/>
-              </a:spcAft>
-            </a:pPr>
-            <a:r>
-              <a:rPr sz="1500">
-                <a:solidFill>
-                  <a:srgbClr val="22282E"/>
-                </a:solidFill>
-              </a:rPr>
-              <a:t>•  IA y la corriges con la evidencia; la decisión de escalado es tuya y está justificada.</a:t>
+              <a:t>•  Un LLM y datos de un ejercicio defensivo (p. ej. el lab blue-team-soc</a:t>
+            </a:r>
+          </a:p>
+          <a:p>
+            <a:pPr>
+              <a:spcAft>
+                <a:spcPts val="600"/>
+              </a:spcAft>
+            </a:pPr>
+            <a:r>
+              <a:rPr sz="1500">
+                <a:solidFill>
+                  <a:srgbClr val="22282E"/>
+                </a:solidFill>
+              </a:rPr>
+              <a:t>•  o el dfir-memoria). Trabaja con datos anonimizados.</a:t>
             </a:r>
           </a:p>
         </p:txBody>
